--- a/BACKUP&RECOVERY/08장/08장_ARCHIVELOG_복구_데이터파일_완전복구.pptx
+++ b/BACKUP&RECOVERY/08장/08장_ARCHIVELOG_복구_데이터파일_완전복구.pptx
@@ -6921,7 +6921,7 @@
                 <a:latin typeface="Consolas"/>
                 <a:ea typeface="Consolas"/>
               </a:rPr>
-              <a:t>SYS@orcl&gt; !cp -p /home/oracle/backup/ch08/users01.dbf /u01/app/oracle/oradata/ORCL/</a:t>
+              <a:t>SYS@orcl&gt; !cp -p /home/oracle/backup/ch08/users01.dbf /u01/app/oracle/oradata/orcl/</a:t>
             </a:r>
           </a:p>
           <a:p>
@@ -9273,7 +9273,7 @@
                 <a:latin typeface="Consolas"/>
                 <a:ea typeface="Consolas"/>
               </a:rPr>
-              <a:t>                 /home/oracle/backup/ch08/users02.dbf /u01/app/oracle/oradata/ORCL/</a:t>
+              <a:t>                 /home/oracle/backup/ch08/users02.dbf /u01/app/oracle/oradata/orcl/</a:t>
             </a:r>
           </a:p>
           <a:p>
@@ -10877,7 +10877,7 @@
                 <a:latin typeface="Consolas"/>
                 <a:ea typeface="Consolas"/>
               </a:rPr>
-              <a:t>        11 /u01/app/oracle/oradata/ORCL/tbs01.dbf          2404180</a:t>
+              <a:t>        11 /u01/app/oracle/oradata/orcl/tbs01.dbf          2404180</a:t>
             </a:r>
           </a:p>
           <a:p>
@@ -10962,7 +10962,7 @@
                 <a:latin typeface="Consolas"/>
                 <a:ea typeface="Consolas"/>
               </a:rPr>
-              <a:t>  2  AS '/u01/app/oracle/oradata/ORCL/tbs01.dbf';</a:t>
+              <a:t>  2  AS '/u01/app/oracle/oradata/orcl/tbs01.dbf';</a:t>
             </a:r>
           </a:p>
           <a:p>
@@ -11774,7 +11774,7 @@
                 <a:latin typeface="Consolas"/>
                 <a:ea typeface="Consolas"/>
               </a:rPr>
-              <a:t>SYS@orcl&gt; !mkdir -p /u02/oradata/ORCL</a:t>
+              <a:t>SYS@orcl&gt; !mkdir -p /u02/oradata/orcl</a:t>
             </a:r>
           </a:p>
           <a:p>
@@ -11791,7 +11791,7 @@
                 <a:latin typeface="Consolas"/>
                 <a:ea typeface="Consolas"/>
               </a:rPr>
-              <a:t>SYS@orcl&gt; !cp -p /home/oracle/backup/ch08/users01.dbf /u02/oradata/ORCL/</a:t>
+              <a:t>SYS@orcl&gt; !cp -p /home/oracle/backup/ch08/users01.dbf /u02/oradata/orcl/</a:t>
             </a:r>
           </a:p>
           <a:p>
@@ -11842,7 +11842,7 @@
                 <a:latin typeface="Consolas"/>
                 <a:ea typeface="Consolas"/>
               </a:rPr>
-              <a:t>  2    '/u01/app/oracle/oradata/ORCL/users01.dbf'</a:t>
+              <a:t>  2    '/u01/app/oracle/oradata/orcl/users01.dbf'</a:t>
             </a:r>
           </a:p>
           <a:p>
@@ -11859,7 +11859,7 @@
                 <a:latin typeface="Consolas"/>
                 <a:ea typeface="Consolas"/>
               </a:rPr>
-              <a:t>  3  TO '/u02/oradata/ORCL/users01.dbf';</a:t>
+              <a:t>  3  TO '/u02/oradata/orcl/users01.dbf';</a:t>
             </a:r>
           </a:p>
           <a:p>
@@ -16347,7 +16347,7 @@
                 <a:latin typeface="Consolas"/>
                 <a:ea typeface="Consolas"/>
               </a:rPr>
-              <a:t>Archive destination            /u02/arch1</a:t>
+              <a:t>Archive destination            /home/oracle/arch1</a:t>
             </a:r>
           </a:p>
           <a:p>
@@ -16500,7 +16500,7 @@
                 <a:latin typeface="Consolas"/>
                 <a:ea typeface="Consolas"/>
               </a:rPr>
-              <a:t>        19 /u02/arch1/1_19_1200530011.dbf          11-MAY-25</a:t>
+              <a:t>        19 /home/oracle/arch1/arch_1_19_1200533800.arc          11-MAY-25</a:t>
             </a:r>
           </a:p>
           <a:p>
@@ -16517,7 +16517,7 @@
                 <a:latin typeface="Consolas"/>
                 <a:ea typeface="Consolas"/>
               </a:rPr>
-              <a:t>        18 /u02/arch1/1_18_1200530011.dbf          11-MAY-25</a:t>
+              <a:t>        18 /home/oracle/arch1/arch_1_18_1200533800.arc          11-MAY-25</a:t>
             </a:r>
           </a:p>
           <a:p>
@@ -16534,7 +16534,7 @@
                 <a:latin typeface="Consolas"/>
                 <a:ea typeface="Consolas"/>
               </a:rPr>
-              <a:t>        17 /u02/arch1/1_17_1200530011.dbf          11-MAY-25</a:t>
+              <a:t>        17 /home/oracle/arch1/arch_1_17_1200533800.arc          11-MAY-25</a:t>
             </a:r>
           </a:p>
         </p:txBody>
